--- a/SMART BATTERY MANAGEMENT AND THERMAL PROTECTION SYSTEM WITH.pptx
+++ b/SMART BATTERY MANAGEMENT AND THERMAL PROTECTION SYSTEM WITH.pptx
@@ -12,8 +12,8 @@
     <p:sldId id="268" r:id="rId6"/>
     <p:sldId id="266" r:id="rId7"/>
     <p:sldId id="264" r:id="rId8"/>
-    <p:sldId id="261" r:id="rId9"/>
-    <p:sldId id="258" r:id="rId10"/>
+    <p:sldId id="258" r:id="rId9"/>
+    <p:sldId id="261" r:id="rId10"/>
     <p:sldId id="265" r:id="rId11"/>
   </p:sldIdLst>
   <p:sldSz cx="12192000" cy="6858000"/>
@@ -121,20 +121,12 @@
 </p:presentation>
 </file>
 
-<file path=ppt/revisionInfo.xml><?xml version="1.0" encoding="utf-8"?>
-<p1510:revInfo xmlns:a="http://schemas.openxmlformats.org/drawingml/2006/main" xmlns:r="http://schemas.openxmlformats.org/officeDocument/2006/relationships" xmlns:p1510="http://schemas.microsoft.com/office/powerpoint/2015/10/main">
-  <p1510:revLst>
-    <p1510:client id="{976D5394-43F8-45C0-8C35-76DFAB8FF9B8}" v="155" dt="2026-02-22T15:56:04.701"/>
-  </p1510:revLst>
-</p1510:revInfo>
-</file>
-
 <file path=ppt/changesInfos/changesInfo1.xml><?xml version="1.0" encoding="utf-8"?>
 <pc:chgInfo xmlns:a="http://schemas.openxmlformats.org/drawingml/2006/main" xmlns:r="http://schemas.openxmlformats.org/officeDocument/2006/relationships" xmlns:ac="http://schemas.microsoft.com/office/drawing/2013/main/command" xmlns:pc="http://schemas.microsoft.com/office/powerpoint/2013/main/command">
   <pc:docChgLst>
     <pc:chgData name="munnam bhavya" userId="89817c2804f01956" providerId="LiveId" clId="{673CACA1-769E-43ED-A8F8-FA56F8482530}"/>
     <pc:docChg chg="undo custSel addSld delSld modSld sldOrd">
-      <pc:chgData name="munnam bhavya" userId="89817c2804f01956" providerId="LiveId" clId="{673CACA1-769E-43ED-A8F8-FA56F8482530}" dt="2026-02-22T15:59:20.074" v="1282" actId="2711"/>
+      <pc:chgData name="munnam bhavya" userId="89817c2804f01956" providerId="LiveId" clId="{673CACA1-769E-43ED-A8F8-FA56F8482530}" dt="2026-02-25T03:58:02.217" v="1291" actId="208"/>
       <pc:docMkLst>
         <pc:docMk/>
       </pc:docMkLst>
@@ -150,14 +142,6 @@
             <pc:docMk/>
             <pc:sldMk cId="2701352409" sldId="256"/>
             <ac:spMk id="3" creationId="{E7FDF5B8-1C55-FE60-5798-60BD676212FE}"/>
-          </ac:spMkLst>
-        </pc:spChg>
-        <pc:spChg chg="add del mod">
-          <ac:chgData name="munnam bhavya" userId="89817c2804f01956" providerId="LiveId" clId="{673CACA1-769E-43ED-A8F8-FA56F8482530}" dt="2026-02-22T15:45:38.497" v="1087" actId="478"/>
-          <ac:spMkLst>
-            <pc:docMk/>
-            <pc:sldMk cId="2701352409" sldId="256"/>
-            <ac:spMk id="9" creationId="{35DA55F4-3A84-DA9F-77CD-A027983F2319}"/>
           </ac:spMkLst>
         </pc:spChg>
         <pc:spChg chg="mod">
@@ -184,22 +168,6 @@
             <ac:picMk id="7" creationId="{8FC6A431-1408-81EE-0BD2-CC4D44510317}"/>
           </ac:picMkLst>
         </pc:picChg>
-        <pc:picChg chg="del">
-          <ac:chgData name="munnam bhavya" userId="89817c2804f01956" providerId="LiveId" clId="{673CACA1-769E-43ED-A8F8-FA56F8482530}" dt="2026-02-22T13:36:49.317" v="284" actId="478"/>
-          <ac:picMkLst>
-            <pc:docMk/>
-            <pc:sldMk cId="2701352409" sldId="256"/>
-            <ac:picMk id="14" creationId="{3608D838-AD00-AC37-F108-68EFC47747E4}"/>
-          </ac:picMkLst>
-        </pc:picChg>
-        <pc:picChg chg="del">
-          <ac:chgData name="munnam bhavya" userId="89817c2804f01956" providerId="LiveId" clId="{673CACA1-769E-43ED-A8F8-FA56F8482530}" dt="2026-02-22T13:35:56.982" v="274" actId="478"/>
-          <ac:picMkLst>
-            <pc:docMk/>
-            <pc:sldMk cId="2701352409" sldId="256"/>
-            <ac:picMk id="16" creationId="{9DFB5488-4A69-D4A4-0FA4-038CC170442F}"/>
-          </ac:picMkLst>
-        </pc:picChg>
       </pc:sldChg>
       <pc:sldChg chg="modSp mod modTransition">
         <pc:chgData name="munnam bhavya" userId="89817c2804f01956" providerId="LiveId" clId="{673CACA1-769E-43ED-A8F8-FA56F8482530}" dt="2026-02-19T09:32:55.785" v="268" actId="255"/>
@@ -217,25 +185,17 @@
         </pc:spChg>
       </pc:sldChg>
       <pc:sldChg chg="addSp delSp modSp mod ord modTransition modAnim">
-        <pc:chgData name="munnam bhavya" userId="89817c2804f01956" providerId="LiveId" clId="{673CACA1-769E-43ED-A8F8-FA56F8482530}" dt="2026-02-22T15:42:52.032" v="1080" actId="122"/>
+        <pc:chgData name="munnam bhavya" userId="89817c2804f01956" providerId="LiveId" clId="{673CACA1-769E-43ED-A8F8-FA56F8482530}" dt="2026-02-25T03:57:03.342" v="1288" actId="208"/>
         <pc:sldMkLst>
           <pc:docMk/>
           <pc:sldMk cId="2198849552" sldId="259"/>
         </pc:sldMkLst>
-        <pc:spChg chg="del">
-          <ac:chgData name="munnam bhavya" userId="89817c2804f01956" providerId="LiveId" clId="{673CACA1-769E-43ED-A8F8-FA56F8482530}" dt="2026-02-22T14:27:48.087" v="352" actId="478"/>
+        <pc:spChg chg="mod">
+          <ac:chgData name="munnam bhavya" userId="89817c2804f01956" providerId="LiveId" clId="{673CACA1-769E-43ED-A8F8-FA56F8482530}" dt="2026-02-25T03:57:03.342" v="1288" actId="208"/>
           <ac:spMkLst>
             <pc:docMk/>
             <pc:sldMk cId="2198849552" sldId="259"/>
-            <ac:spMk id="2" creationId="{58662D72-91D4-78D6-96E0-C60BEC137A8A}"/>
-          </ac:spMkLst>
-        </pc:spChg>
-        <pc:spChg chg="add del mod">
-          <ac:chgData name="munnam bhavya" userId="89817c2804f01956" providerId="LiveId" clId="{673CACA1-769E-43ED-A8F8-FA56F8482530}" dt="2026-02-22T14:51:57.129" v="455" actId="478"/>
-          <ac:spMkLst>
-            <pc:docMk/>
-            <pc:sldMk cId="2198849552" sldId="259"/>
-            <ac:spMk id="4" creationId="{A21007E3-CD1E-E9D8-704F-DFB57D3C274D}"/>
+            <ac:spMk id="3" creationId="{19259078-4482-8A72-E8E7-60764B255D1A}"/>
           </ac:spMkLst>
         </pc:spChg>
         <pc:spChg chg="add del mod">
@@ -246,14 +206,6 @@
             <ac:spMk id="6" creationId="{272268FD-2596-8A00-FA71-BEAEB2C7C3CD}"/>
           </ac:spMkLst>
         </pc:spChg>
-        <pc:picChg chg="del mod">
-          <ac:chgData name="munnam bhavya" userId="89817c2804f01956" providerId="LiveId" clId="{673CACA1-769E-43ED-A8F8-FA56F8482530}" dt="2026-02-22T14:27:42.405" v="351" actId="478"/>
-          <ac:picMkLst>
-            <pc:docMk/>
-            <pc:sldMk cId="2198849552" sldId="259"/>
-            <ac:picMk id="11" creationId="{C04049BA-7969-5763-D429-CBB00E323C09}"/>
-          </ac:picMkLst>
-        </pc:picChg>
       </pc:sldChg>
       <pc:sldChg chg="modSp mod modTransition">
         <pc:chgData name="munnam bhavya" userId="89817c2804f01956" providerId="LiveId" clId="{673CACA1-769E-43ED-A8F8-FA56F8482530}" dt="2026-02-22T13:38:54.745" v="299" actId="255"/>
@@ -270,15 +222,23 @@
           </ac:spMkLst>
         </pc:spChg>
       </pc:sldChg>
-      <pc:sldChg chg="ord modTransition">
-        <pc:chgData name="munnam bhavya" userId="89817c2804f01956" providerId="LiveId" clId="{673CACA1-769E-43ED-A8F8-FA56F8482530}" dt="2026-02-18T10:23:36.298" v="257"/>
+      <pc:sldChg chg="modSp mod ord modTransition">
+        <pc:chgData name="munnam bhavya" userId="89817c2804f01956" providerId="LiveId" clId="{673CACA1-769E-43ED-A8F8-FA56F8482530}" dt="2026-02-25T03:57:50.976" v="1290" actId="208"/>
         <pc:sldMkLst>
           <pc:docMk/>
           <pc:sldMk cId="1362483094" sldId="261"/>
         </pc:sldMkLst>
+        <pc:spChg chg="mod">
+          <ac:chgData name="munnam bhavya" userId="89817c2804f01956" providerId="LiveId" clId="{673CACA1-769E-43ED-A8F8-FA56F8482530}" dt="2026-02-25T03:57:50.976" v="1290" actId="208"/>
+          <ac:spMkLst>
+            <pc:docMk/>
+            <pc:sldMk cId="1362483094" sldId="261"/>
+            <ac:spMk id="4" creationId="{0CB20F24-9DA9-2589-FAE2-81CB7169FC7B}"/>
+          </ac:spMkLst>
+        </pc:spChg>
       </pc:sldChg>
       <pc:sldChg chg="addSp modSp mod ord modTransition modAnim">
-        <pc:chgData name="munnam bhavya" userId="89817c2804f01956" providerId="LiveId" clId="{673CACA1-769E-43ED-A8F8-FA56F8482530}" dt="2026-02-22T15:59:20.074" v="1282" actId="2711"/>
+        <pc:chgData name="munnam bhavya" userId="89817c2804f01956" providerId="LiveId" clId="{673CACA1-769E-43ED-A8F8-FA56F8482530}" dt="2026-02-25T03:45:03.839" v="1287" actId="20577"/>
         <pc:sldMkLst>
           <pc:docMk/>
           <pc:sldMk cId="1608517021" sldId="262"/>
@@ -300,7 +260,7 @@
           </ac:spMkLst>
         </pc:spChg>
         <pc:spChg chg="add mod">
-          <ac:chgData name="munnam bhavya" userId="89817c2804f01956" providerId="LiveId" clId="{673CACA1-769E-43ED-A8F8-FA56F8482530}" dt="2026-02-22T15:59:20.074" v="1282" actId="2711"/>
+          <ac:chgData name="munnam bhavya" userId="89817c2804f01956" providerId="LiveId" clId="{673CACA1-769E-43ED-A8F8-FA56F8482530}" dt="2026-02-25T03:45:03.839" v="1287" actId="20577"/>
           <ac:spMkLst>
             <pc:docMk/>
             <pc:sldMk cId="1608517021" sldId="262"/>
@@ -309,41 +269,17 @@
         </pc:spChg>
       </pc:sldChg>
       <pc:sldChg chg="addSp delSp modSp mod modTransition modAnim">
-        <pc:chgData name="munnam bhavya" userId="89817c2804f01956" providerId="LiveId" clId="{673CACA1-769E-43ED-A8F8-FA56F8482530}" dt="2026-02-22T15:53:46.722" v="1248" actId="1076"/>
+        <pc:chgData name="munnam bhavya" userId="89817c2804f01956" providerId="LiveId" clId="{673CACA1-769E-43ED-A8F8-FA56F8482530}" dt="2026-02-25T03:57:24.930" v="1289" actId="208"/>
         <pc:sldMkLst>
           <pc:docMk/>
           <pc:sldMk cId="2535658818" sldId="264"/>
         </pc:sldMkLst>
-        <pc:spChg chg="del">
-          <ac:chgData name="munnam bhavya" userId="89817c2804f01956" providerId="LiveId" clId="{673CACA1-769E-43ED-A8F8-FA56F8482530}" dt="2026-02-22T14:29:11.101" v="356" actId="478"/>
-          <ac:spMkLst>
-            <pc:docMk/>
-            <pc:sldMk cId="2535658818" sldId="264"/>
-            <ac:spMk id="2" creationId="{7E55D47B-9005-C697-E6CA-AB497E0E420C}"/>
-          </ac:spMkLst>
-        </pc:spChg>
         <pc:spChg chg="mod">
-          <ac:chgData name="munnam bhavya" userId="89817c2804f01956" providerId="LiveId" clId="{673CACA1-769E-43ED-A8F8-FA56F8482530}" dt="2026-02-22T14:29:43.948" v="368" actId="14100"/>
+          <ac:chgData name="munnam bhavya" userId="89817c2804f01956" providerId="LiveId" clId="{673CACA1-769E-43ED-A8F8-FA56F8482530}" dt="2026-02-25T03:57:24.930" v="1289" actId="208"/>
           <ac:spMkLst>
             <pc:docMk/>
             <pc:sldMk cId="2535658818" sldId="264"/>
             <ac:spMk id="3" creationId="{6E161A39-8834-6AD8-E55E-EA40C5E27755}"/>
-          </ac:spMkLst>
-        </pc:spChg>
-        <pc:spChg chg="del mod">
-          <ac:chgData name="munnam bhavya" userId="89817c2804f01956" providerId="LiveId" clId="{673CACA1-769E-43ED-A8F8-FA56F8482530}" dt="2026-02-22T14:29:18.936" v="358" actId="478"/>
-          <ac:spMkLst>
-            <pc:docMk/>
-            <pc:sldMk cId="2535658818" sldId="264"/>
-            <ac:spMk id="4" creationId="{1FE13DE1-85DD-1394-69D0-CBE5720DBD3F}"/>
-          </ac:spMkLst>
-        </pc:spChg>
-        <pc:spChg chg="del mod">
-          <ac:chgData name="munnam bhavya" userId="89817c2804f01956" providerId="LiveId" clId="{673CACA1-769E-43ED-A8F8-FA56F8482530}" dt="2026-02-22T14:29:33.037" v="365" actId="478"/>
-          <ac:spMkLst>
-            <pc:docMk/>
-            <pc:sldMk cId="2535658818" sldId="264"/>
-            <ac:spMk id="5" creationId="{DDD3035B-250B-CBE4-34C0-CC5BC7EE7489}"/>
           </ac:spMkLst>
         </pc:spChg>
         <pc:spChg chg="mod">
@@ -352,22 +288,6 @@
             <pc:docMk/>
             <pc:sldMk cId="2535658818" sldId="264"/>
             <ac:spMk id="6" creationId="{F46AF5B4-DD94-0F1E-A121-1C746FAA48B7}"/>
-          </ac:spMkLst>
-        </pc:spChg>
-        <pc:spChg chg="del">
-          <ac:chgData name="munnam bhavya" userId="89817c2804f01956" providerId="LiveId" clId="{673CACA1-769E-43ED-A8F8-FA56F8482530}" dt="2026-02-22T14:29:29.889" v="363" actId="478"/>
-          <ac:spMkLst>
-            <pc:docMk/>
-            <pc:sldMk cId="2535658818" sldId="264"/>
-            <ac:spMk id="7" creationId="{4DC1301A-3062-FBF9-8FE6-EB19CCA7A360}"/>
-          </ac:spMkLst>
-        </pc:spChg>
-        <pc:spChg chg="del">
-          <ac:chgData name="munnam bhavya" userId="89817c2804f01956" providerId="LiveId" clId="{673CACA1-769E-43ED-A8F8-FA56F8482530}" dt="2026-02-22T14:29:25.336" v="360" actId="478"/>
-          <ac:spMkLst>
-            <pc:docMk/>
-            <pc:sldMk cId="2535658818" sldId="264"/>
-            <ac:spMk id="8" creationId="{DEF7BD5A-6556-C918-2408-05DA620B72E5}"/>
           </ac:spMkLst>
         </pc:spChg>
         <pc:spChg chg="add mod">
@@ -402,52 +322,12 @@
             <ac:picMk id="9" creationId="{2B3ABE42-6449-4332-C8D7-D032D3E6A3D6}"/>
           </ac:picMkLst>
         </pc:picChg>
-        <pc:picChg chg="del mod">
-          <ac:chgData name="munnam bhavya" userId="89817c2804f01956" providerId="LiveId" clId="{673CACA1-769E-43ED-A8F8-FA56F8482530}" dt="2026-02-22T14:29:08.907" v="354" actId="478"/>
-          <ac:picMkLst>
-            <pc:docMk/>
-            <pc:sldMk cId="2535658818" sldId="264"/>
-            <ac:picMk id="10" creationId="{2972A4CC-0A5A-6218-BC6D-75D718ED8F5D}"/>
-          </ac:picMkLst>
-        </pc:picChg>
-        <pc:picChg chg="del mod">
-          <ac:chgData name="munnam bhavya" userId="89817c2804f01956" providerId="LiveId" clId="{673CACA1-769E-43ED-A8F8-FA56F8482530}" dt="2026-02-22T14:29:09.998" v="355" actId="478"/>
-          <ac:picMkLst>
-            <pc:docMk/>
-            <pc:sldMk cId="2535658818" sldId="264"/>
-            <ac:picMk id="11" creationId="{4EA2BDA4-ADBB-B1A1-455B-4E2BE762F915}"/>
-          </ac:picMkLst>
-        </pc:picChg>
-        <pc:picChg chg="del mod">
-          <ac:chgData name="munnam bhavya" userId="89817c2804f01956" providerId="LiveId" clId="{673CACA1-769E-43ED-A8F8-FA56F8482530}" dt="2026-02-22T14:29:27.640" v="362" actId="478"/>
-          <ac:picMkLst>
-            <pc:docMk/>
-            <pc:sldMk cId="2535658818" sldId="264"/>
-            <ac:picMk id="12" creationId="{40FBF97E-1B76-F79D-3510-55D82D1E8312}"/>
-          </ac:picMkLst>
-        </pc:picChg>
         <pc:picChg chg="add mod">
           <ac:chgData name="munnam bhavya" userId="89817c2804f01956" providerId="LiveId" clId="{673CACA1-769E-43ED-A8F8-FA56F8482530}" dt="2026-02-22T14:36:09.942" v="406" actId="14100"/>
           <ac:picMkLst>
             <pc:docMk/>
             <pc:sldMk cId="2535658818" sldId="264"/>
             <ac:picMk id="13" creationId="{22A7BE80-B79A-66CE-89DB-3B6E402319CE}"/>
-          </ac:picMkLst>
-        </pc:picChg>
-        <pc:picChg chg="del mod">
-          <ac:chgData name="munnam bhavya" userId="89817c2804f01956" providerId="LiveId" clId="{673CACA1-769E-43ED-A8F8-FA56F8482530}" dt="2026-02-22T14:29:26.617" v="361" actId="478"/>
-          <ac:picMkLst>
-            <pc:docMk/>
-            <pc:sldMk cId="2535658818" sldId="264"/>
-            <ac:picMk id="14" creationId="{86C59004-EA37-AE99-5703-5E5B4600B05F}"/>
-          </ac:picMkLst>
-        </pc:picChg>
-        <pc:picChg chg="del mod">
-          <ac:chgData name="munnam bhavya" userId="89817c2804f01956" providerId="LiveId" clId="{673CACA1-769E-43ED-A8F8-FA56F8482530}" dt="2026-02-22T14:29:22.931" v="359" actId="478"/>
-          <ac:picMkLst>
-            <pc:docMk/>
-            <pc:sldMk cId="2535658818" sldId="264"/>
-            <ac:picMk id="15" creationId="{B6D7576E-3AC9-7830-0857-A5D167B1EE7B}"/>
           </ac:picMkLst>
         </pc:picChg>
         <pc:picChg chg="add mod">
@@ -468,7 +348,7 @@
         </pc:picChg>
       </pc:sldChg>
       <pc:sldChg chg="addSp delSp modSp mod modTransition delAnim modAnim">
-        <pc:chgData name="munnam bhavya" userId="89817c2804f01956" providerId="LiveId" clId="{673CACA1-769E-43ED-A8F8-FA56F8482530}" dt="2026-02-18T10:16:18.927" v="245"/>
+        <pc:chgData name="munnam bhavya" userId="89817c2804f01956" providerId="LiveId" clId="{673CACA1-769E-43ED-A8F8-FA56F8482530}" dt="2026-02-25T03:58:02.217" v="1291" actId="208"/>
         <pc:sldMkLst>
           <pc:docMk/>
           <pc:sldMk cId="2230535105" sldId="265"/>
@@ -479,6 +359,14 @@
             <pc:docMk/>
             <pc:sldMk cId="2230535105" sldId="265"/>
             <ac:spMk id="2" creationId="{6A8F24C8-318A-89A6-BD79-CC3537DA9F06}"/>
+          </ac:spMkLst>
+        </pc:spChg>
+        <pc:spChg chg="mod">
+          <ac:chgData name="munnam bhavya" userId="89817c2804f01956" providerId="LiveId" clId="{673CACA1-769E-43ED-A8F8-FA56F8482530}" dt="2026-02-25T03:58:02.217" v="1291" actId="208"/>
+          <ac:spMkLst>
+            <pc:docMk/>
+            <pc:sldMk cId="2230535105" sldId="265"/>
+            <ac:spMk id="3" creationId="{E14F95C7-6D3B-BA08-5523-37744BF57C8F}"/>
           </ac:spMkLst>
         </pc:spChg>
       </pc:sldChg>
@@ -504,14 +392,6 @@
             <ac:spMk id="3" creationId="{175F6041-00D8-9884-E5E5-2A6BF8FACC40}"/>
           </ac:spMkLst>
         </pc:spChg>
-        <pc:spChg chg="del">
-          <ac:chgData name="munnam bhavya" userId="89817c2804f01956" providerId="LiveId" clId="{673CACA1-769E-43ED-A8F8-FA56F8482530}" dt="2026-02-22T15:43:56.137" v="1083" actId="478"/>
-          <ac:spMkLst>
-            <pc:docMk/>
-            <pc:sldMk cId="666743157" sldId="266"/>
-            <ac:spMk id="4" creationId="{3918A1D0-0937-6946-5CD9-A03791B86875}"/>
-          </ac:spMkLst>
-        </pc:spChg>
         <pc:spChg chg="mod">
           <ac:chgData name="munnam bhavya" userId="89817c2804f01956" providerId="LiveId" clId="{673CACA1-769E-43ED-A8F8-FA56F8482530}" dt="2026-02-22T13:39:28.594" v="302" actId="255"/>
           <ac:spMkLst>
@@ -528,29 +408,6 @@
             <ac:picMk id="7" creationId="{18C49523-C5F0-EED6-4025-585AD88687FC}"/>
           </ac:picMkLst>
         </pc:picChg>
-        <pc:picChg chg="del mod">
-          <ac:chgData name="munnam bhavya" userId="89817c2804f01956" providerId="LiveId" clId="{673CACA1-769E-43ED-A8F8-FA56F8482530}" dt="2026-02-22T14:28:59.891" v="353" actId="21"/>
-          <ac:picMkLst>
-            <pc:docMk/>
-            <pc:sldMk cId="666743157" sldId="266"/>
-            <ac:picMk id="8" creationId="{2B3ABE42-6449-4332-C8D7-D032D3E6A3D6}"/>
-          </ac:picMkLst>
-        </pc:picChg>
-      </pc:sldChg>
-      <pc:sldChg chg="addSp delSp modSp add del mod ord modTransition">
-        <pc:chgData name="munnam bhavya" userId="89817c2804f01956" providerId="LiveId" clId="{673CACA1-769E-43ED-A8F8-FA56F8482530}" dt="2026-02-22T15:44:58.281" v="1084" actId="47"/>
-        <pc:sldMkLst>
-          <pc:docMk/>
-          <pc:sldMk cId="2634837515" sldId="267"/>
-        </pc:sldMkLst>
-        <pc:spChg chg="add mod">
-          <ac:chgData name="munnam bhavya" userId="89817c2804f01956" providerId="LiveId" clId="{673CACA1-769E-43ED-A8F8-FA56F8482530}" dt="2026-02-22T14:47:02.607" v="417" actId="122"/>
-          <ac:spMkLst>
-            <pc:docMk/>
-            <pc:sldMk cId="2634837515" sldId="267"/>
-            <ac:spMk id="6" creationId="{1F48753A-170E-D284-191E-53B2DB2FD558}"/>
-          </ac:spMkLst>
-        </pc:spChg>
       </pc:sldChg>
       <pc:sldChg chg="addSp delSp modSp new mod ord modTransition">
         <pc:chgData name="munnam bhavya" userId="89817c2804f01956" providerId="LiveId" clId="{673CACA1-769E-43ED-A8F8-FA56F8482530}" dt="2026-02-22T15:41:41.076" v="1072"/>
@@ -564,14 +421,6 @@
             <pc:docMk/>
             <pc:sldMk cId="1797255223" sldId="268"/>
             <ac:spMk id="2" creationId="{462A2AB6-2830-076B-45FF-B87453600050}"/>
-          </ac:spMkLst>
-        </pc:spChg>
-        <pc:spChg chg="add del mod">
-          <ac:chgData name="munnam bhavya" userId="89817c2804f01956" providerId="LiveId" clId="{673CACA1-769E-43ED-A8F8-FA56F8482530}" dt="2026-02-22T14:53:54.476" v="484" actId="478"/>
-          <ac:spMkLst>
-            <pc:docMk/>
-            <pc:sldMk cId="1797255223" sldId="268"/>
-            <ac:spMk id="3" creationId="{090690C0-838E-059E-B72D-A5BC5F374545}"/>
           </ac:spMkLst>
         </pc:spChg>
         <pc:spChg chg="add mod topLvl">
@@ -654,14 +503,6 @@
             <ac:spMk id="13" creationId="{4DE31BD2-0848-D3D3-4C74-59CC22B01ABE}"/>
           </ac:spMkLst>
         </pc:spChg>
-        <pc:spChg chg="add del mod">
-          <ac:chgData name="munnam bhavya" userId="89817c2804f01956" providerId="LiveId" clId="{673CACA1-769E-43ED-A8F8-FA56F8482530}" dt="2026-02-22T14:55:48.442" v="500"/>
-          <ac:spMkLst>
-            <pc:docMk/>
-            <pc:sldMk cId="1797255223" sldId="268"/>
-            <ac:spMk id="15" creationId="{FBF3C4BB-43A8-6958-0A99-3C16AAE133AE}"/>
-          </ac:spMkLst>
-        </pc:spChg>
         <pc:spChg chg="add mod">
           <ac:chgData name="munnam bhavya" userId="89817c2804f01956" providerId="LiveId" clId="{673CACA1-769E-43ED-A8F8-FA56F8482530}" dt="2026-02-22T15:27:37.910" v="943" actId="207"/>
           <ac:spMkLst>
@@ -676,14 +517,6 @@
             <pc:docMk/>
             <pc:sldMk cId="1797255223" sldId="268"/>
             <ac:spMk id="17" creationId="{DCEB937A-9387-FB7C-FC5E-74D139C70A17}"/>
-          </ac:spMkLst>
-        </pc:spChg>
-        <pc:spChg chg="add del mod">
-          <ac:chgData name="munnam bhavya" userId="89817c2804f01956" providerId="LiveId" clId="{673CACA1-769E-43ED-A8F8-FA56F8482530}" dt="2026-02-22T15:00:35.821" v="576" actId="478"/>
-          <ac:spMkLst>
-            <pc:docMk/>
-            <pc:sldMk cId="1797255223" sldId="268"/>
-            <ac:spMk id="18" creationId="{B92D2D94-87D6-F86C-F958-65C208EF8005}"/>
           </ac:spMkLst>
         </pc:spChg>
         <pc:spChg chg="add mod">
@@ -726,14 +559,6 @@
             <ac:spMk id="24" creationId="{5BDA9D73-E9F6-8292-3127-F60E2EE0A293}"/>
           </ac:spMkLst>
         </pc:spChg>
-        <pc:spChg chg="add del mod">
-          <ac:chgData name="munnam bhavya" userId="89817c2804f01956" providerId="LiveId" clId="{673CACA1-769E-43ED-A8F8-FA56F8482530}" dt="2026-02-22T15:11:05.603" v="740" actId="478"/>
-          <ac:spMkLst>
-            <pc:docMk/>
-            <pc:sldMk cId="1797255223" sldId="268"/>
-            <ac:spMk id="28" creationId="{789CF711-A13F-F439-8052-D93F689FEE90}"/>
-          </ac:spMkLst>
-        </pc:spChg>
         <pc:spChg chg="add mod">
           <ac:chgData name="munnam bhavya" userId="89817c2804f01956" providerId="LiveId" clId="{673CACA1-769E-43ED-A8F8-FA56F8482530}" dt="2026-02-22T15:14:58.472" v="828" actId="164"/>
           <ac:spMkLst>
@@ -748,14 +573,6 @@
             <pc:docMk/>
             <pc:sldMk cId="1797255223" sldId="268"/>
             <ac:spMk id="30" creationId="{52BBBCFC-D758-118B-C0C0-D9D0D710BF27}"/>
-          </ac:spMkLst>
-        </pc:spChg>
-        <pc:spChg chg="add del mod">
-          <ac:chgData name="munnam bhavya" userId="89817c2804f01956" providerId="LiveId" clId="{673CACA1-769E-43ED-A8F8-FA56F8482530}" dt="2026-02-22T15:12:45.740" v="785" actId="478"/>
-          <ac:spMkLst>
-            <pc:docMk/>
-            <pc:sldMk cId="1797255223" sldId="268"/>
-            <ac:spMk id="31" creationId="{ACB1B5DF-49FC-CF55-6DA2-C7D581E2C71A}"/>
           </ac:spMkLst>
         </pc:spChg>
         <pc:spChg chg="add mod">
@@ -782,148 +599,12 @@
             <ac:spMk id="34" creationId="{CF4895AA-00E9-CB0E-A269-4327DF5F7674}"/>
           </ac:spMkLst>
         </pc:spChg>
-        <pc:spChg chg="add del mod">
-          <ac:chgData name="munnam bhavya" userId="89817c2804f01956" providerId="LiveId" clId="{673CACA1-769E-43ED-A8F8-FA56F8482530}" dt="2026-02-22T15:15:56.840" v="833" actId="478"/>
-          <ac:spMkLst>
-            <pc:docMk/>
-            <pc:sldMk cId="1797255223" sldId="268"/>
-            <ac:spMk id="36" creationId="{99FB9584-67CD-B10D-DB13-588CB6FDE75F}"/>
-          </ac:spMkLst>
-        </pc:spChg>
-        <pc:spChg chg="add del mod">
-          <ac:chgData name="munnam bhavya" userId="89817c2804f01956" providerId="LiveId" clId="{673CACA1-769E-43ED-A8F8-FA56F8482530}" dt="2026-02-22T15:23:07.084" v="891" actId="478"/>
-          <ac:spMkLst>
-            <pc:docMk/>
-            <pc:sldMk cId="1797255223" sldId="268"/>
-            <ac:spMk id="37" creationId="{897E9367-2B96-9EC5-A083-BF172657BF55}"/>
-          </ac:spMkLst>
-        </pc:spChg>
-        <pc:spChg chg="add del mod">
-          <ac:chgData name="munnam bhavya" userId="89817c2804f01956" providerId="LiveId" clId="{673CACA1-769E-43ED-A8F8-FA56F8482530}" dt="2026-02-22T15:23:06.208" v="890" actId="478"/>
-          <ac:spMkLst>
-            <pc:docMk/>
-            <pc:sldMk cId="1797255223" sldId="268"/>
-            <ac:spMk id="38" creationId="{13AE1A63-8DC5-18E0-F322-EBBAE429173F}"/>
-          </ac:spMkLst>
-        </pc:spChg>
-        <pc:spChg chg="add del mod">
-          <ac:chgData name="munnam bhavya" userId="89817c2804f01956" providerId="LiveId" clId="{673CACA1-769E-43ED-A8F8-FA56F8482530}" dt="2026-02-22T15:23:08.275" v="892" actId="478"/>
-          <ac:spMkLst>
-            <pc:docMk/>
-            <pc:sldMk cId="1797255223" sldId="268"/>
-            <ac:spMk id="39" creationId="{D4D46C50-0734-1E77-9852-84FBA811FD8C}"/>
-          </ac:spMkLst>
-        </pc:spChg>
-        <pc:spChg chg="add del mod">
-          <ac:chgData name="munnam bhavya" userId="89817c2804f01956" providerId="LiveId" clId="{673CACA1-769E-43ED-A8F8-FA56F8482530}" dt="2026-02-22T15:23:13.863" v="897" actId="478"/>
-          <ac:spMkLst>
-            <pc:docMk/>
-            <pc:sldMk cId="1797255223" sldId="268"/>
-            <ac:spMk id="40" creationId="{A40F8757-B27F-DC2C-1D6A-7EA2C6F5F717}"/>
-          </ac:spMkLst>
-        </pc:spChg>
-        <pc:spChg chg="add del mod">
-          <ac:chgData name="munnam bhavya" userId="89817c2804f01956" providerId="LiveId" clId="{673CACA1-769E-43ED-A8F8-FA56F8482530}" dt="2026-02-22T15:23:11.735" v="896" actId="478"/>
-          <ac:spMkLst>
-            <pc:docMk/>
-            <pc:sldMk cId="1797255223" sldId="268"/>
-            <ac:spMk id="41" creationId="{1D3F6CFB-5FD5-2A16-40A2-E3C7C6DFCFDD}"/>
-          </ac:spMkLst>
-        </pc:spChg>
-        <pc:spChg chg="add del mod">
-          <ac:chgData name="munnam bhavya" userId="89817c2804f01956" providerId="LiveId" clId="{673CACA1-769E-43ED-A8F8-FA56F8482530}" dt="2026-02-22T15:23:10.907" v="895" actId="478"/>
-          <ac:spMkLst>
-            <pc:docMk/>
-            <pc:sldMk cId="1797255223" sldId="268"/>
-            <ac:spMk id="42" creationId="{76BF1FCF-13A7-A4BD-15A8-5F5863541EE4}"/>
-          </ac:spMkLst>
-        </pc:spChg>
-        <pc:spChg chg="add del mod">
-          <ac:chgData name="munnam bhavya" userId="89817c2804f01956" providerId="LiveId" clId="{673CACA1-769E-43ED-A8F8-FA56F8482530}" dt="2026-02-22T15:23:09.436" v="893" actId="478"/>
-          <ac:spMkLst>
-            <pc:docMk/>
-            <pc:sldMk cId="1797255223" sldId="268"/>
-            <ac:spMk id="43" creationId="{89961EAF-A868-C619-64DF-FC2993EC83CF}"/>
-          </ac:spMkLst>
-        </pc:spChg>
-        <pc:spChg chg="add del mod">
-          <ac:chgData name="munnam bhavya" userId="89817c2804f01956" providerId="LiveId" clId="{673CACA1-769E-43ED-A8F8-FA56F8482530}" dt="2026-02-22T15:23:10.124" v="894" actId="478"/>
-          <ac:spMkLst>
-            <pc:docMk/>
-            <pc:sldMk cId="1797255223" sldId="268"/>
-            <ac:spMk id="44" creationId="{F51340A0-C219-74BB-F400-FCE2FEE3C348}"/>
-          </ac:spMkLst>
-        </pc:spChg>
-        <pc:spChg chg="add mod">
-          <ac:chgData name="munnam bhavya" userId="89817c2804f01956" providerId="LiveId" clId="{673CACA1-769E-43ED-A8F8-FA56F8482530}" dt="2026-02-22T15:22:52.763" v="886" actId="1076"/>
-          <ac:spMkLst>
-            <pc:docMk/>
-            <pc:sldMk cId="1797255223" sldId="268"/>
-            <ac:spMk id="45" creationId="{9D13A5BD-0237-D262-963E-78DB86B59032}"/>
-          </ac:spMkLst>
-        </pc:spChg>
-        <pc:spChg chg="add mod">
-          <ac:chgData name="munnam bhavya" userId="89817c2804f01956" providerId="LiveId" clId="{673CACA1-769E-43ED-A8F8-FA56F8482530}" dt="2026-02-22T15:22:53.136" v="887" actId="1076"/>
-          <ac:spMkLst>
-            <pc:docMk/>
-            <pc:sldMk cId="1797255223" sldId="268"/>
-            <ac:spMk id="46" creationId="{FA180D47-82F8-8522-C662-3401D7B3CBC1}"/>
-          </ac:spMkLst>
-        </pc:spChg>
-        <pc:spChg chg="add mod">
-          <ac:chgData name="munnam bhavya" userId="89817c2804f01956" providerId="LiveId" clId="{673CACA1-769E-43ED-A8F8-FA56F8482530}" dt="2026-02-22T15:22:53.466" v="888" actId="1076"/>
-          <ac:spMkLst>
-            <pc:docMk/>
-            <pc:sldMk cId="1797255223" sldId="268"/>
-            <ac:spMk id="47" creationId="{6FC27CA9-2FA8-1930-4293-B0638E3162FA}"/>
-          </ac:spMkLst>
-        </pc:spChg>
-        <pc:spChg chg="add mod">
-          <ac:chgData name="munnam bhavya" userId="89817c2804f01956" providerId="LiveId" clId="{673CACA1-769E-43ED-A8F8-FA56F8482530}" dt="2026-02-22T15:22:51.033" v="883" actId="1076"/>
-          <ac:spMkLst>
-            <pc:docMk/>
-            <pc:sldMk cId="1797255223" sldId="268"/>
-            <ac:spMk id="48" creationId="{193950B9-140C-50A1-F204-945393C33670}"/>
-          </ac:spMkLst>
-        </pc:spChg>
-        <pc:spChg chg="add mod">
-          <ac:chgData name="munnam bhavya" userId="89817c2804f01956" providerId="LiveId" clId="{673CACA1-769E-43ED-A8F8-FA56F8482530}" dt="2026-02-22T15:22:51.377" v="884" actId="1076"/>
-          <ac:spMkLst>
-            <pc:docMk/>
-            <pc:sldMk cId="1797255223" sldId="268"/>
-            <ac:spMk id="49" creationId="{79C28805-6473-162B-EC8C-9D348FD4922C}"/>
-          </ac:spMkLst>
-        </pc:spChg>
         <pc:spChg chg="add mod">
           <ac:chgData name="munnam bhavya" userId="89817c2804f01956" providerId="LiveId" clId="{673CACA1-769E-43ED-A8F8-FA56F8482530}" dt="2026-02-22T15:38:01.876" v="1038" actId="164"/>
           <ac:spMkLst>
             <pc:docMk/>
             <pc:sldMk cId="1797255223" sldId="268"/>
             <ac:spMk id="70" creationId="{A1AA4F5D-427D-8D09-3B47-2FA63AF00440}"/>
-          </ac:spMkLst>
-        </pc:spChg>
-        <pc:spChg chg="add del">
-          <ac:chgData name="munnam bhavya" userId="89817c2804f01956" providerId="LiveId" clId="{673CACA1-769E-43ED-A8F8-FA56F8482530}" dt="2026-02-22T15:31:37.938" v="964" actId="478"/>
-          <ac:spMkLst>
-            <pc:docMk/>
-            <pc:sldMk cId="1797255223" sldId="268"/>
-            <ac:spMk id="73" creationId="{09A72AF8-85F1-7FE0-A7D0-0EB1BFC15E28}"/>
-          </ac:spMkLst>
-        </pc:spChg>
-        <pc:spChg chg="add del">
-          <ac:chgData name="munnam bhavya" userId="89817c2804f01956" providerId="LiveId" clId="{673CACA1-769E-43ED-A8F8-FA56F8482530}" dt="2026-02-22T15:32:23.346" v="969" actId="478"/>
-          <ac:spMkLst>
-            <pc:docMk/>
-            <pc:sldMk cId="1797255223" sldId="268"/>
-            <ac:spMk id="76" creationId="{A2FB0280-F2D9-6421-9D04-F74D6950C417}"/>
-          </ac:spMkLst>
-        </pc:spChg>
-        <pc:spChg chg="add del mod">
-          <ac:chgData name="munnam bhavya" userId="89817c2804f01956" providerId="LiveId" clId="{673CACA1-769E-43ED-A8F8-FA56F8482530}" dt="2026-02-22T15:33:27.432" v="972" actId="478"/>
-          <ac:spMkLst>
-            <pc:docMk/>
-            <pc:sldMk cId="1797255223" sldId="268"/>
-            <ac:spMk id="77" creationId="{5074A0EB-283E-443B-7976-940EA34C9760}"/>
           </ac:spMkLst>
         </pc:spChg>
         <pc:spChg chg="add mod">
@@ -935,27 +616,11 @@
           </ac:spMkLst>
         </pc:spChg>
         <pc:spChg chg="add mod">
-          <ac:chgData name="munnam bhavya" userId="89817c2804f01956" providerId="LiveId" clId="{673CACA1-769E-43ED-A8F8-FA56F8482530}" dt="2026-02-22T15:37:32.023" v="1034" actId="1076"/>
-          <ac:spMkLst>
-            <pc:docMk/>
-            <pc:sldMk cId="1797255223" sldId="268"/>
-            <ac:spMk id="84" creationId="{187E14C0-89B1-C924-607B-411D957E93BE}"/>
-          </ac:spMkLst>
-        </pc:spChg>
-        <pc:spChg chg="add mod">
           <ac:chgData name="munnam bhavya" userId="89817c2804f01956" providerId="LiveId" clId="{673CACA1-769E-43ED-A8F8-FA56F8482530}" dt="2026-02-22T15:39:04.302" v="1059" actId="1076"/>
           <ac:spMkLst>
             <pc:docMk/>
             <pc:sldMk cId="1797255223" sldId="268"/>
             <ac:spMk id="86" creationId="{C816CF4E-254C-4C62-F04B-DF5EE18EC83B}"/>
-          </ac:spMkLst>
-        </pc:spChg>
-        <pc:spChg chg="add del mod">
-          <ac:chgData name="munnam bhavya" userId="89817c2804f01956" providerId="LiveId" clId="{673CACA1-769E-43ED-A8F8-FA56F8482530}" dt="2026-02-22T15:39:55.863" v="1065" actId="478"/>
-          <ac:spMkLst>
-            <pc:docMk/>
-            <pc:sldMk cId="1797255223" sldId="268"/>
-            <ac:spMk id="87" creationId="{C958A63E-8AA6-D20D-48D1-9F1118C6650B}"/>
           </ac:spMkLst>
         </pc:spChg>
         <pc:spChg chg="add mod">
@@ -972,22 +637,6 @@
             <pc:docMk/>
             <pc:sldMk cId="1797255223" sldId="268"/>
             <ac:grpSpMk id="14" creationId="{0E616486-F742-2707-09D0-FE6016C1AF08}"/>
-          </ac:grpSpMkLst>
-        </pc:grpChg>
-        <pc:grpChg chg="add del mod">
-          <ac:chgData name="munnam bhavya" userId="89817c2804f01956" providerId="LiveId" clId="{673CACA1-769E-43ED-A8F8-FA56F8482530}" dt="2026-02-22T15:10:03.492" v="735" actId="165"/>
-          <ac:grpSpMkLst>
-            <pc:docMk/>
-            <pc:sldMk cId="1797255223" sldId="268"/>
-            <ac:grpSpMk id="23" creationId="{A8D485FA-2CDE-5BBD-CEE2-5D74CA29AF74}"/>
-          </ac:grpSpMkLst>
-        </pc:grpChg>
-        <pc:grpChg chg="add mod">
-          <ac:chgData name="munnam bhavya" userId="89817c2804f01956" providerId="LiveId" clId="{673CACA1-769E-43ED-A8F8-FA56F8482530}" dt="2026-02-22T15:08:20.327" v="725" actId="164"/>
-          <ac:grpSpMkLst>
-            <pc:docMk/>
-            <pc:sldMk cId="1797255223" sldId="268"/>
-            <ac:grpSpMk id="25" creationId="{C426DEBA-1A31-AAAF-6DB8-8A4110C42550}"/>
           </ac:grpSpMkLst>
         </pc:grpChg>
         <pc:grpChg chg="add mod">
@@ -1046,14 +695,6 @@
             <ac:grpSpMk id="85" creationId="{CEC1966D-3C82-93B4-6501-21A28D7575B5}"/>
           </ac:grpSpMkLst>
         </pc:grpChg>
-        <pc:cxnChg chg="add del">
-          <ac:chgData name="munnam bhavya" userId="89817c2804f01956" providerId="LiveId" clId="{673CACA1-769E-43ED-A8F8-FA56F8482530}" dt="2026-02-22T15:22:40.120" v="875" actId="11529"/>
-          <ac:cxnSpMkLst>
-            <pc:docMk/>
-            <pc:sldMk cId="1797255223" sldId="268"/>
-            <ac:cxnSpMk id="51" creationId="{E24F6758-B243-9A2B-F1AD-648F70BE5520}"/>
-          </ac:cxnSpMkLst>
-        </pc:cxnChg>
         <pc:cxnChg chg="add mod">
           <ac:chgData name="munnam bhavya" userId="89817c2804f01956" providerId="LiveId" clId="{673CACA1-769E-43ED-A8F8-FA56F8482530}" dt="2026-02-22T15:24:32.608" v="906" actId="14100"/>
           <ac:cxnSpMkLst>
@@ -1158,22 +799,6 @@
             <ac:cxnSpMk id="67" creationId="{5872736D-F545-4420-E524-DBC79DF7C95B}"/>
           </ac:cxnSpMkLst>
         </pc:cxnChg>
-        <pc:cxnChg chg="add del">
-          <ac:chgData name="munnam bhavya" userId="89817c2804f01956" providerId="LiveId" clId="{673CACA1-769E-43ED-A8F8-FA56F8482530}" dt="2026-02-22T15:31:16.946" v="962" actId="478"/>
-          <ac:cxnSpMkLst>
-            <pc:docMk/>
-            <pc:sldMk cId="1797255223" sldId="268"/>
-            <ac:cxnSpMk id="72" creationId="{9C0EB729-9180-495B-CFED-6317B5F63ACC}"/>
-          </ac:cxnSpMkLst>
-        </pc:cxnChg>
-        <pc:cxnChg chg="add del mod">
-          <ac:chgData name="munnam bhavya" userId="89817c2804f01956" providerId="LiveId" clId="{673CACA1-769E-43ED-A8F8-FA56F8482530}" dt="2026-02-22T15:31:56.072" v="967" actId="478"/>
-          <ac:cxnSpMkLst>
-            <pc:docMk/>
-            <pc:sldMk cId="1797255223" sldId="268"/>
-            <ac:cxnSpMk id="75" creationId="{59FECC32-89AD-DD30-EC76-2DB5C57CFE0D}"/>
-          </ac:cxnSpMkLst>
-        </pc:cxnChg>
         <pc:cxnChg chg="add mod">
           <ac:chgData name="munnam bhavya" userId="89817c2804f01956" providerId="LiveId" clId="{673CACA1-769E-43ED-A8F8-FA56F8482530}" dt="2026-02-22T15:40:16.929" v="1067" actId="14100"/>
           <ac:cxnSpMkLst>
@@ -1343,7 +968,7 @@
           <a:p>
             <a:fld id="{E0BF9742-8BEC-436C-B7D1-D274E75387C0}" type="datetimeFigureOut">
               <a:rPr lang="en-US" smtClean="0"/>
-              <a:t>2/22/2026</a:t>
+              <a:t>2/25/2026</a:t>
             </a:fld>
             <a:endParaRPr lang="en-US"/>
           </a:p>
@@ -1553,7 +1178,7 @@
           <a:p>
             <a:fld id="{E0BF9742-8BEC-436C-B7D1-D274E75387C0}" type="datetimeFigureOut">
               <a:rPr lang="en-US" smtClean="0"/>
-              <a:t>2/22/2026</a:t>
+              <a:t>2/25/2026</a:t>
             </a:fld>
             <a:endParaRPr lang="en-US"/>
           </a:p>
@@ -1773,7 +1398,7 @@
           <a:p>
             <a:fld id="{E0BF9742-8BEC-436C-B7D1-D274E75387C0}" type="datetimeFigureOut">
               <a:rPr lang="en-US" smtClean="0"/>
-              <a:t>2/22/2026</a:t>
+              <a:t>2/25/2026</a:t>
             </a:fld>
             <a:endParaRPr lang="en-US"/>
           </a:p>
@@ -1983,7 +1608,7 @@
           <a:p>
             <a:fld id="{E0BF9742-8BEC-436C-B7D1-D274E75387C0}" type="datetimeFigureOut">
               <a:rPr lang="en-US" smtClean="0"/>
-              <a:t>2/22/2026</a:t>
+              <a:t>2/25/2026</a:t>
             </a:fld>
             <a:endParaRPr lang="en-US"/>
           </a:p>
@@ -2270,7 +1895,7 @@
           <a:p>
             <a:fld id="{E0BF9742-8BEC-436C-B7D1-D274E75387C0}" type="datetimeFigureOut">
               <a:rPr lang="en-US" smtClean="0"/>
-              <a:t>2/22/2026</a:t>
+              <a:t>2/25/2026</a:t>
             </a:fld>
             <a:endParaRPr lang="en-US"/>
           </a:p>
@@ -2547,7 +2172,7 @@
           <a:p>
             <a:fld id="{E0BF9742-8BEC-436C-B7D1-D274E75387C0}" type="datetimeFigureOut">
               <a:rPr lang="en-US" smtClean="0"/>
-              <a:t>2/22/2026</a:t>
+              <a:t>2/25/2026</a:t>
             </a:fld>
             <a:endParaRPr lang="en-US"/>
           </a:p>
@@ -2971,7 +2596,7 @@
           <a:p>
             <a:fld id="{E0BF9742-8BEC-436C-B7D1-D274E75387C0}" type="datetimeFigureOut">
               <a:rPr lang="en-US" smtClean="0"/>
-              <a:t>2/22/2026</a:t>
+              <a:t>2/25/2026</a:t>
             </a:fld>
             <a:endParaRPr lang="en-US"/>
           </a:p>
@@ -3124,7 +2749,7 @@
           <a:p>
             <a:fld id="{E0BF9742-8BEC-436C-B7D1-D274E75387C0}" type="datetimeFigureOut">
               <a:rPr lang="en-US" smtClean="0"/>
-              <a:t>2/22/2026</a:t>
+              <a:t>2/25/2026</a:t>
             </a:fld>
             <a:endParaRPr lang="en-US"/>
           </a:p>
@@ -3249,7 +2874,7 @@
           <a:p>
             <a:fld id="{E0BF9742-8BEC-436C-B7D1-D274E75387C0}" type="datetimeFigureOut">
               <a:rPr lang="en-US" smtClean="0"/>
-              <a:t>2/22/2026</a:t>
+              <a:t>2/25/2026</a:t>
             </a:fld>
             <a:endParaRPr lang="en-US"/>
           </a:p>
@@ -3572,7 +3197,7 @@
           <a:p>
             <a:fld id="{E0BF9742-8BEC-436C-B7D1-D274E75387C0}" type="datetimeFigureOut">
               <a:rPr lang="en-US" smtClean="0"/>
-              <a:t>2/22/2026</a:t>
+              <a:t>2/25/2026</a:t>
             </a:fld>
             <a:endParaRPr lang="en-US"/>
           </a:p>
@@ -3872,7 +3497,7 @@
           <a:p>
             <a:fld id="{E0BF9742-8BEC-436C-B7D1-D274E75387C0}" type="datetimeFigureOut">
               <a:rPr lang="en-US" smtClean="0"/>
-              <a:t>2/22/2026</a:t>
+              <a:t>2/25/2026</a:t>
             </a:fld>
             <a:endParaRPr lang="en-US"/>
           </a:p>
@@ -4125,7 +3750,7 @@
           <a:p>
             <a:fld id="{E0BF9742-8BEC-436C-B7D1-D274E75387C0}" type="datetimeFigureOut">
               <a:rPr lang="en-US" smtClean="0"/>
-              <a:t>2/22/2026</a:t>
+              <a:t>2/25/2026</a:t>
             </a:fld>
             <a:endParaRPr lang="en-US"/>
           </a:p>
@@ -5002,7 +4627,11 @@
             <a:avLst/>
           </a:prstGeom>
           <a:noFill/>
-          <a:ln w="38100"/>
+          <a:ln w="38100">
+            <a:solidFill>
+              <a:schemeClr val="tx1"/>
+            </a:solidFill>
+          </a:ln>
         </p:spPr>
         <p:style>
           <a:lnRef idx="2">
@@ -5477,7 +5106,14 @@
             <a:avLst/>
           </a:prstGeom>
           <a:noFill/>
-          <a:ln w="38100"/>
+          <a:ln w="38100">
+            <a:solidFill>
+              <a:schemeClr val="tx1">
+                <a:lumMod val="95000"/>
+                <a:lumOff val="5000"/>
+              </a:schemeClr>
+            </a:solidFill>
+          </a:ln>
         </p:spPr>
         <p:style>
           <a:lnRef idx="2">
@@ -5963,8 +5599,8 @@
           </a:p>
         </p:txBody>
       </p:sp>
-      <mc:AlternateContent xmlns:mc="http://schemas.openxmlformats.org/markup-compatibility/2006">
-        <mc:Choice xmlns:a14="http://schemas.microsoft.com/office/drawing/2010/main" Requires="a14">
+      <mc:AlternateContent xmlns:mc="http://schemas.openxmlformats.org/markup-compatibility/2006" xmlns:a14="http://schemas.microsoft.com/office/drawing/2010/main">
+        <mc:Choice Requires="a14">
           <p:sp>
             <p:nvSpPr>
               <p:cNvPr id="3" name="Content Placeholder 2">
@@ -6417,7 +6053,7 @@
             </p:txBody>
           </p:sp>
         </mc:Choice>
-        <mc:Fallback>
+        <mc:Fallback xmlns="">
           <p:sp>
             <p:nvSpPr>
               <p:cNvPr id="3" name="Content Placeholder 2">
@@ -6531,7 +6167,7 @@
         </p:nvSpPr>
         <p:spPr>
           <a:xfrm>
-            <a:off x="3733670" y="2803817"/>
+            <a:off x="8508869" y="2744551"/>
             <a:ext cx="5012267" cy="338554"/>
           </a:xfrm>
           <a:prstGeom prst="rect">
@@ -6546,12 +6182,20 @@
           <a:lstStyle/>
           <a:p>
             <a:r>
+              <a:rPr lang="en-US" sz="1600">
+                <a:latin typeface="Times New Roman" panose="02020603050405020304" pitchFamily="18" charset="0"/>
+                <a:ea typeface="Cambria Math" panose="02040503050406030204" pitchFamily="18" charset="0"/>
+                <a:cs typeface="Times New Roman" panose="02020603050405020304" pitchFamily="18" charset="0"/>
+              </a:rPr>
+              <a:t>-(</a:t>
+            </a:r>
+            <a:r>
               <a:rPr lang="en-US" sz="1600" dirty="0">
                 <a:latin typeface="Times New Roman" panose="02020603050405020304" pitchFamily="18" charset="0"/>
                 <a:ea typeface="Cambria Math" panose="02040503050406030204" pitchFamily="18" charset="0"/>
                 <a:cs typeface="Times New Roman" panose="02020603050405020304" pitchFamily="18" charset="0"/>
               </a:rPr>
-              <a:t>(proposed by Rudolf E. Kalman)</a:t>
+              <a:t>proposed by Rudolf E. Kalman)</a:t>
             </a:r>
           </a:p>
         </p:txBody>
@@ -8659,11 +8303,11 @@
   <p:clrMapOvr>
     <a:masterClrMapping/>
   </p:clrMapOvr>
-  <mc:AlternateContent xmlns:mc="http://schemas.openxmlformats.org/markup-compatibility/2006">
-    <mc:Choice xmlns:p14="http://schemas.microsoft.com/office/powerpoint/2010/main" Requires="p14">
+  <mc:AlternateContent xmlns:mc="http://schemas.openxmlformats.org/markup-compatibility/2006" xmlns:p14="http://schemas.microsoft.com/office/powerpoint/2010/main">
+    <mc:Choice Requires="p14">
       <p:transition p14:dur="0"/>
     </mc:Choice>
-    <mc:Fallback>
+    <mc:Fallback xmlns="">
       <p:transition/>
     </mc:Fallback>
   </mc:AlternateContent>
@@ -8916,7 +8560,14 @@
             <a:avLst/>
           </a:prstGeom>
           <a:noFill/>
-          <a:ln w="38100"/>
+          <a:ln w="38100">
+            <a:solidFill>
+              <a:schemeClr val="tx1">
+                <a:lumMod val="95000"/>
+                <a:lumOff val="5000"/>
+              </a:schemeClr>
+            </a:solidFill>
+          </a:ln>
         </p:spPr>
         <p:style>
           <a:lnRef idx="2">
@@ -9310,6 +8961,200 @@
   <p:cSld>
     <p:spTree>
       <p:nvGrpSpPr>
+        <p:cNvPr id="1" name=""/>
+        <p:cNvGrpSpPr/>
+        <p:nvPr/>
+      </p:nvGrpSpPr>
+      <p:grpSpPr>
+        <a:xfrm>
+          <a:off x="0" y="0"/>
+          <a:ext cx="0" cy="0"/>
+          <a:chOff x="0" y="0"/>
+          <a:chExt cx="0" cy="0"/>
+        </a:xfrm>
+      </p:grpSpPr>
+      <p:sp>
+        <p:nvSpPr>
+          <p:cNvPr id="2" name="Title 1">
+            <a:extLst>
+              <a:ext uri="{FF2B5EF4-FFF2-40B4-BE49-F238E27FC236}">
+                <a16:creationId xmlns:a16="http://schemas.microsoft.com/office/drawing/2014/main" id="{FA76B1C9-1A17-5ACC-D739-A4D064A8A207}"/>
+              </a:ext>
+            </a:extLst>
+          </p:cNvPr>
+          <p:cNvSpPr>
+            <a:spLocks noGrp="1"/>
+          </p:cNvSpPr>
+          <p:nvPr>
+            <p:ph type="ctrTitle"/>
+          </p:nvPr>
+        </p:nvSpPr>
+        <p:spPr>
+          <a:xfrm>
+            <a:off x="965200" y="1122363"/>
+            <a:ext cx="9846732" cy="943504"/>
+          </a:xfrm>
+        </p:spPr>
+        <p:txBody>
+          <a:bodyPr>
+            <a:normAutofit/>
+          </a:bodyPr>
+          <a:lstStyle/>
+          <a:p>
+            <a:r>
+              <a:rPr lang="en-US" sz="5400" b="1" dirty="0">
+                <a:latin typeface="Times New Roman" panose="02020603050405020304" pitchFamily="18" charset="0"/>
+                <a:cs typeface="Times New Roman" panose="02020603050405020304" pitchFamily="18" charset="0"/>
+              </a:rPr>
+              <a:t>CONCLUSION</a:t>
+            </a:r>
+            <a:endParaRPr lang="en-US" sz="5400" dirty="0"/>
+          </a:p>
+        </p:txBody>
+      </p:sp>
+      <p:sp>
+        <p:nvSpPr>
+          <p:cNvPr id="3" name="Subtitle 2">
+            <a:extLst>
+              <a:ext uri="{FF2B5EF4-FFF2-40B4-BE49-F238E27FC236}">
+                <a16:creationId xmlns:a16="http://schemas.microsoft.com/office/drawing/2014/main" id="{ECAC9895-6807-F06E-4005-2E0B66B5D7D5}"/>
+              </a:ext>
+            </a:extLst>
+          </p:cNvPr>
+          <p:cNvSpPr>
+            <a:spLocks noGrp="1"/>
+          </p:cNvSpPr>
+          <p:nvPr>
+            <p:ph type="subTitle" idx="1"/>
+          </p:nvPr>
+        </p:nvSpPr>
+        <p:spPr>
+          <a:xfrm>
+            <a:off x="965200" y="2065867"/>
+            <a:ext cx="9846733" cy="4250266"/>
+          </a:xfrm>
+        </p:spPr>
+        <p:txBody>
+          <a:bodyPr>
+            <a:normAutofit/>
+          </a:bodyPr>
+          <a:lstStyle/>
+          <a:p>
+            <a:endParaRPr lang="en-US" b="1" dirty="0">
+              <a:latin typeface="Times New Roman" panose="02020603050405020304" pitchFamily="18" charset="0"/>
+              <a:cs typeface="Times New Roman" panose="02020603050405020304" pitchFamily="18" charset="0"/>
+            </a:endParaRPr>
+          </a:p>
+          <a:p>
+            <a:pPr>
+              <a:lnSpc>
+                <a:spcPct val="150000"/>
+              </a:lnSpc>
+            </a:pPr>
+            <a:r>
+              <a:rPr lang="en-US" sz="2800" b="1" dirty="0">
+                <a:latin typeface="Times New Roman" panose="02020603050405020304" pitchFamily="18" charset="0"/>
+                <a:cs typeface="Times New Roman" panose="02020603050405020304" pitchFamily="18" charset="0"/>
+              </a:rPr>
+              <a:t>  </a:t>
+            </a:r>
+            <a:r>
+              <a:rPr lang="en-US" dirty="0">
+                <a:latin typeface="Times New Roman" panose="02020603050405020304" pitchFamily="18" charset="0"/>
+                <a:cs typeface="Times New Roman" panose="02020603050405020304" pitchFamily="18" charset="0"/>
+              </a:rPr>
+              <a:t>The project successfully developed a smart battery management system that improves efficiency, safety, and lifespan. With real-time monitoring, automated protection, and cloud integration, it provides a reliable solution for battery management. Future enhancements include AI-based battery health prediction, 5G integration, and expansion to EV and industrial applications.</a:t>
+            </a:r>
+          </a:p>
+          <a:p>
+            <a:endParaRPr lang="en-IN" dirty="0"/>
+          </a:p>
+          <a:p>
+            <a:endParaRPr lang="en-US" dirty="0"/>
+          </a:p>
+        </p:txBody>
+      </p:sp>
+      <p:sp>
+        <p:nvSpPr>
+          <p:cNvPr id="4" name="Rectangle 3">
+            <a:extLst>
+              <a:ext uri="{FF2B5EF4-FFF2-40B4-BE49-F238E27FC236}">
+                <a16:creationId xmlns:a16="http://schemas.microsoft.com/office/drawing/2014/main" id="{2AFBBBFE-8697-DE0D-8D5A-6D75CA45860A}"/>
+              </a:ext>
+            </a:extLst>
+          </p:cNvPr>
+          <p:cNvSpPr/>
+          <p:nvPr/>
+        </p:nvSpPr>
+        <p:spPr>
+          <a:xfrm>
+            <a:off x="491067" y="541866"/>
+            <a:ext cx="11184465" cy="5774267"/>
+          </a:xfrm>
+          <a:prstGeom prst="rect">
+            <a:avLst/>
+          </a:prstGeom>
+          <a:noFill/>
+          <a:ln w="38100">
+            <a:solidFill>
+              <a:schemeClr val="tx1">
+                <a:lumMod val="95000"/>
+                <a:lumOff val="5000"/>
+              </a:schemeClr>
+            </a:solidFill>
+          </a:ln>
+        </p:spPr>
+        <p:style>
+          <a:lnRef idx="2">
+            <a:schemeClr val="accent1">
+              <a:shade val="15000"/>
+            </a:schemeClr>
+          </a:lnRef>
+          <a:fillRef idx="1">
+            <a:schemeClr val="accent1"/>
+          </a:fillRef>
+          <a:effectRef idx="0">
+            <a:schemeClr val="accent1"/>
+          </a:effectRef>
+          <a:fontRef idx="minor">
+            <a:schemeClr val="lt1"/>
+          </a:fontRef>
+        </p:style>
+        <p:txBody>
+          <a:bodyPr rtlCol="0" anchor="ctr"/>
+          <a:lstStyle/>
+          <a:p>
+            <a:pPr algn="ctr"/>
+            <a:endParaRPr lang="en-US"/>
+          </a:p>
+        </p:txBody>
+      </p:sp>
+    </p:spTree>
+    <p:extLst>
+      <p:ext uri="{BB962C8B-B14F-4D97-AF65-F5344CB8AC3E}">
+        <p14:creationId xmlns:p14="http://schemas.microsoft.com/office/powerpoint/2010/main" val="2698806845"/>
+      </p:ext>
+    </p:extLst>
+  </p:cSld>
+  <p:clrMapOvr>
+    <a:masterClrMapping/>
+  </p:clrMapOvr>
+  <mc:AlternateContent xmlns:mc="http://schemas.openxmlformats.org/markup-compatibility/2006" xmlns:p14="http://schemas.microsoft.com/office/powerpoint/2010/main">
+    <mc:Choice Requires="p14">
+      <p:transition p14:dur="0"/>
+    </mc:Choice>
+    <mc:Fallback xmlns="">
+      <p:transition/>
+    </mc:Fallback>
+  </mc:AlternateContent>
+</p:sld>
+</file>
+
+<file path=ppt/slides/slide9.xml><?xml version="1.0" encoding="utf-8"?>
+<p:sld xmlns:a="http://schemas.openxmlformats.org/drawingml/2006/main" xmlns:r="http://schemas.openxmlformats.org/officeDocument/2006/relationships" xmlns:p="http://schemas.openxmlformats.org/presentationml/2006/main">
+  <p:cSld>
+    <p:spTree>
+      <p:nvGrpSpPr>
         <p:cNvPr id="1" name="">
           <a:extLst>
             <a:ext uri="{FF2B5EF4-FFF2-40B4-BE49-F238E27FC236}">
@@ -9350,6 +9195,9 @@
           </a:prstGeom>
           <a:noFill/>
           <a:ln w="38100">
+            <a:solidFill>
+              <a:schemeClr val="tx1"/>
+            </a:solidFill>
             <a:extLst>
               <a:ext uri="{C807C97D-BFC1-408E-A445-0C87EB9F89A2}">
                 <ask:lineSketchStyleProps xmlns:ask="http://schemas.microsoft.com/office/drawing/2018/sketchyshapes">
@@ -10040,200 +9888,6 @@
     <p:extLst>
       <p:ext uri="{BB962C8B-B14F-4D97-AF65-F5344CB8AC3E}">
         <p14:creationId xmlns:p14="http://schemas.microsoft.com/office/powerpoint/2010/main" val="1362483094"/>
-      </p:ext>
-    </p:extLst>
-  </p:cSld>
-  <p:clrMapOvr>
-    <a:masterClrMapping/>
-  </p:clrMapOvr>
-  <mc:AlternateContent xmlns:mc="http://schemas.openxmlformats.org/markup-compatibility/2006" xmlns:p14="http://schemas.microsoft.com/office/powerpoint/2010/main">
-    <mc:Choice Requires="p14">
-      <p:transition p14:dur="0"/>
-    </mc:Choice>
-    <mc:Fallback xmlns="">
-      <p:transition/>
-    </mc:Fallback>
-  </mc:AlternateContent>
-</p:sld>
-</file>
-
-<file path=ppt/slides/slide9.xml><?xml version="1.0" encoding="utf-8"?>
-<p:sld xmlns:a="http://schemas.openxmlformats.org/drawingml/2006/main" xmlns:r="http://schemas.openxmlformats.org/officeDocument/2006/relationships" xmlns:p="http://schemas.openxmlformats.org/presentationml/2006/main">
-  <p:cSld>
-    <p:spTree>
-      <p:nvGrpSpPr>
-        <p:cNvPr id="1" name=""/>
-        <p:cNvGrpSpPr/>
-        <p:nvPr/>
-      </p:nvGrpSpPr>
-      <p:grpSpPr>
-        <a:xfrm>
-          <a:off x="0" y="0"/>
-          <a:ext cx="0" cy="0"/>
-          <a:chOff x="0" y="0"/>
-          <a:chExt cx="0" cy="0"/>
-        </a:xfrm>
-      </p:grpSpPr>
-      <p:sp>
-        <p:nvSpPr>
-          <p:cNvPr id="2" name="Title 1">
-            <a:extLst>
-              <a:ext uri="{FF2B5EF4-FFF2-40B4-BE49-F238E27FC236}">
-                <a16:creationId xmlns:a16="http://schemas.microsoft.com/office/drawing/2014/main" id="{FA76B1C9-1A17-5ACC-D739-A4D064A8A207}"/>
-              </a:ext>
-            </a:extLst>
-          </p:cNvPr>
-          <p:cNvSpPr>
-            <a:spLocks noGrp="1"/>
-          </p:cNvSpPr>
-          <p:nvPr>
-            <p:ph type="ctrTitle"/>
-          </p:nvPr>
-        </p:nvSpPr>
-        <p:spPr>
-          <a:xfrm>
-            <a:off x="965200" y="1122363"/>
-            <a:ext cx="9846732" cy="943504"/>
-          </a:xfrm>
-        </p:spPr>
-        <p:txBody>
-          <a:bodyPr>
-            <a:normAutofit/>
-          </a:bodyPr>
-          <a:lstStyle/>
-          <a:p>
-            <a:r>
-              <a:rPr lang="en-US" sz="5400" b="1" dirty="0">
-                <a:latin typeface="Times New Roman" panose="02020603050405020304" pitchFamily="18" charset="0"/>
-                <a:cs typeface="Times New Roman" panose="02020603050405020304" pitchFamily="18" charset="0"/>
-              </a:rPr>
-              <a:t>CONCLUSION</a:t>
-            </a:r>
-            <a:endParaRPr lang="en-US" sz="5400" dirty="0"/>
-          </a:p>
-        </p:txBody>
-      </p:sp>
-      <p:sp>
-        <p:nvSpPr>
-          <p:cNvPr id="3" name="Subtitle 2">
-            <a:extLst>
-              <a:ext uri="{FF2B5EF4-FFF2-40B4-BE49-F238E27FC236}">
-                <a16:creationId xmlns:a16="http://schemas.microsoft.com/office/drawing/2014/main" id="{ECAC9895-6807-F06E-4005-2E0B66B5D7D5}"/>
-              </a:ext>
-            </a:extLst>
-          </p:cNvPr>
-          <p:cNvSpPr>
-            <a:spLocks noGrp="1"/>
-          </p:cNvSpPr>
-          <p:nvPr>
-            <p:ph type="subTitle" idx="1"/>
-          </p:nvPr>
-        </p:nvSpPr>
-        <p:spPr>
-          <a:xfrm>
-            <a:off x="965200" y="2065867"/>
-            <a:ext cx="9846733" cy="4250266"/>
-          </a:xfrm>
-        </p:spPr>
-        <p:txBody>
-          <a:bodyPr>
-            <a:normAutofit/>
-          </a:bodyPr>
-          <a:lstStyle/>
-          <a:p>
-            <a:endParaRPr lang="en-US" b="1" dirty="0">
-              <a:latin typeface="Times New Roman" panose="02020603050405020304" pitchFamily="18" charset="0"/>
-              <a:cs typeface="Times New Roman" panose="02020603050405020304" pitchFamily="18" charset="0"/>
-            </a:endParaRPr>
-          </a:p>
-          <a:p>
-            <a:pPr>
-              <a:lnSpc>
-                <a:spcPct val="150000"/>
-              </a:lnSpc>
-            </a:pPr>
-            <a:r>
-              <a:rPr lang="en-US" sz="2800" b="1" dirty="0">
-                <a:latin typeface="Times New Roman" panose="02020603050405020304" pitchFamily="18" charset="0"/>
-                <a:cs typeface="Times New Roman" panose="02020603050405020304" pitchFamily="18" charset="0"/>
-              </a:rPr>
-              <a:t>  </a:t>
-            </a:r>
-            <a:r>
-              <a:rPr lang="en-US" dirty="0">
-                <a:latin typeface="Times New Roman" panose="02020603050405020304" pitchFamily="18" charset="0"/>
-                <a:cs typeface="Times New Roman" panose="02020603050405020304" pitchFamily="18" charset="0"/>
-              </a:rPr>
-              <a:t>The project successfully developed a smart battery management system that improves efficiency, safety, and lifespan. With real-time monitoring, automated protection, and cloud integration, it provides a reliable solution for battery management. Future enhancements include AI-based battery health prediction, 5G integration, and expansion to EV and industrial applications.</a:t>
-            </a:r>
-          </a:p>
-          <a:p>
-            <a:endParaRPr lang="en-IN" dirty="0"/>
-          </a:p>
-          <a:p>
-            <a:endParaRPr lang="en-US" dirty="0"/>
-          </a:p>
-        </p:txBody>
-      </p:sp>
-      <p:sp>
-        <p:nvSpPr>
-          <p:cNvPr id="4" name="Rectangle 3">
-            <a:extLst>
-              <a:ext uri="{FF2B5EF4-FFF2-40B4-BE49-F238E27FC236}">
-                <a16:creationId xmlns:a16="http://schemas.microsoft.com/office/drawing/2014/main" id="{2AFBBBFE-8697-DE0D-8D5A-6D75CA45860A}"/>
-              </a:ext>
-            </a:extLst>
-          </p:cNvPr>
-          <p:cNvSpPr/>
-          <p:nvPr/>
-        </p:nvSpPr>
-        <p:spPr>
-          <a:xfrm>
-            <a:off x="491067" y="541866"/>
-            <a:ext cx="11184465" cy="5774267"/>
-          </a:xfrm>
-          <a:prstGeom prst="rect">
-            <a:avLst/>
-          </a:prstGeom>
-          <a:noFill/>
-          <a:ln w="38100">
-            <a:solidFill>
-              <a:schemeClr val="tx1">
-                <a:lumMod val="95000"/>
-                <a:lumOff val="5000"/>
-              </a:schemeClr>
-            </a:solidFill>
-          </a:ln>
-        </p:spPr>
-        <p:style>
-          <a:lnRef idx="2">
-            <a:schemeClr val="accent1">
-              <a:shade val="15000"/>
-            </a:schemeClr>
-          </a:lnRef>
-          <a:fillRef idx="1">
-            <a:schemeClr val="accent1"/>
-          </a:fillRef>
-          <a:effectRef idx="0">
-            <a:schemeClr val="accent1"/>
-          </a:effectRef>
-          <a:fontRef idx="minor">
-            <a:schemeClr val="lt1"/>
-          </a:fontRef>
-        </p:style>
-        <p:txBody>
-          <a:bodyPr rtlCol="0" anchor="ctr"/>
-          <a:lstStyle/>
-          <a:p>
-            <a:pPr algn="ctr"/>
-            <a:endParaRPr lang="en-US"/>
-          </a:p>
-        </p:txBody>
-      </p:sp>
-    </p:spTree>
-    <p:extLst>
-      <p:ext uri="{BB962C8B-B14F-4D97-AF65-F5344CB8AC3E}">
-        <p14:creationId xmlns:p14="http://schemas.microsoft.com/office/powerpoint/2010/main" val="2698806845"/>
       </p:ext>
     </p:extLst>
   </p:cSld>
